--- a/DOCUMENTATION_TECHNIQUE.pptx
+++ b/DOCUMENTATION_TECHNIQUE.pptx
@@ -4913,7 +4913,7 @@
                         </a:defRPr>
                       </a:pPr>
                       <a:r>
-                        <a:t>Source_web__c</a:t>
+                        <a:t>callSource__c</a:t>
                       </a:r>
                     </a:p>
                   </a:txBody>
